--- a/Slides/2025-2026/Slides/Statistiek 2025-2026 -- college 4b -- binomiale verdeling deel 2.pptx
+++ b/Slides/2025-2026/Slides/Statistiek 2025-2026 -- college 4b -- binomiale verdeling deel 2.pptx
@@ -14944,8 +14944,8 @@
           </a:p>
         </p:txBody>
       </p:sp>
-      <mc:AlternateContent xmlns:mc="http://schemas.openxmlformats.org/markup-compatibility/2006">
-        <mc:Choice xmlns:a14="http://schemas.microsoft.com/office/drawing/2010/main" Requires="a14">
+      <mc:AlternateContent xmlns:mc="http://schemas.openxmlformats.org/markup-compatibility/2006" xmlns:a14="http://schemas.microsoft.com/office/drawing/2010/main">
+        <mc:Choice Requires="a14">
           <p:sp>
             <p:nvSpPr>
               <p:cNvPr id="3" name="Content Placeholder 2"/>
@@ -15199,13 +15199,7 @@
                   <a:rPr lang="en-US" dirty="0" smtClean="0">
                     <a:latin typeface="RijksoverheidSansText" panose="020B0503040202060203" pitchFamily="34" charset="0"/>
                   </a:rPr>
-                  <a:t> </a:t>
-                </a:r>
-                <a:r>
-                  <a:rPr lang="en-US" dirty="0" smtClean="0">
-                    <a:latin typeface="RijksoverheidSansText" panose="020B0503040202060203" pitchFamily="34" charset="0"/>
-                  </a:rPr>
-                  <a:t>met </a:t>
+                  <a:t> met </a:t>
                 </a:r>
                 <a:r>
                   <a:rPr lang="en-US" dirty="0">
@@ -15724,7 +15718,7 @@
             </p:txBody>
           </p:sp>
         </mc:Choice>
-        <mc:Fallback>
+        <mc:Fallback xmlns="">
           <p:sp>
             <p:nvSpPr>
               <p:cNvPr id="3" name="Content Placeholder 2"/>
@@ -15865,8 +15859,8 @@
           <a:chExt cx="0" cy="0"/>
         </a:xfrm>
       </p:grpSpPr>
-      <mc:AlternateContent xmlns:mc="http://schemas.openxmlformats.org/markup-compatibility/2006">
-        <mc:Choice xmlns:a14="http://schemas.microsoft.com/office/drawing/2010/main" Requires="a14">
+      <mc:AlternateContent xmlns:mc="http://schemas.openxmlformats.org/markup-compatibility/2006" xmlns:a14="http://schemas.microsoft.com/office/drawing/2010/main">
+        <mc:Choice Requires="a14">
           <p:graphicFrame>
             <p:nvGraphicFramePr>
               <p:cNvPr id="4" name="Content Placeholder 3"/>
@@ -15877,7 +15871,7 @@
                 <p:ph idx="1"/>
                 <p:extLst>
                   <p:ext uri="{D42A27DB-BD31-4B8C-83A1-F6EECF244321}">
-                    <p14:modId xmlns:p14="http://schemas.microsoft.com/office/powerpoint/2010/main" val="61585149"/>
+                    <p14:modId xmlns:p14="http://schemas.microsoft.com/office/powerpoint/2010/main" val="3992516769"/>
                   </p:ext>
                 </p:extLst>
               </p:nvPr>
@@ -16928,10 +16922,10 @@
                         <a:p>
                           <a:pPr algn="ctr"/>
                           <a:r>
-                            <a:rPr lang="en-US" sz="2200" b="1" dirty="0" err="1">
+                            <a:rPr lang="en-US" sz="2200" b="1" dirty="0" err="1" smtClean="0">
                               <a:latin typeface="RijksoverheidSansText" panose="020B0503040202060203" pitchFamily="34" charset="0"/>
                             </a:rPr>
-                            <a:t>Standaarddeviatie</a:t>
+                            <a:t>Standaardafwijking</a:t>
                           </a:r>
                           <a:endParaRPr lang="nl-NL" sz="2200" b="1" dirty="0">
                             <a:latin typeface="RijksoverheidSansText" panose="020B0503040202060203" pitchFamily="34" charset="0"/>
@@ -17419,7 +17413,7 @@
             </a:graphic>
           </p:graphicFrame>
         </mc:Choice>
-        <mc:Fallback>
+        <mc:Fallback xmlns="">
           <p:graphicFrame>
             <p:nvGraphicFramePr>
               <p:cNvPr id="4" name="Content Placeholder 3"/>
@@ -17430,7 +17424,7 @@
                 <p:ph idx="1"/>
                 <p:extLst>
                   <p:ext uri="{D42A27DB-BD31-4B8C-83A1-F6EECF244321}">
-                    <p14:modId xmlns:p14="http://schemas.microsoft.com/office/powerpoint/2010/main" val="61585149"/>
+                    <p14:modId xmlns:p14="http://schemas.microsoft.com/office/powerpoint/2010/main" val="3992516769"/>
                   </p:ext>
                 </p:extLst>
               </p:nvPr>
@@ -17788,10 +17782,10 @@
                         <a:p>
                           <a:pPr algn="ctr"/>
                           <a:r>
-                            <a:rPr lang="en-US" sz="2200" b="1" dirty="0" err="1">
+                            <a:rPr lang="en-US" sz="2200" b="1" dirty="0" err="1" smtClean="0">
                               <a:latin typeface="RijksoverheidSansText" panose="020B0503040202060203" pitchFamily="34" charset="0"/>
                             </a:rPr>
-                            <a:t>Standaarddeviatie</a:t>
+                            <a:t>Standaardafwijking</a:t>
                           </a:r>
                           <a:endParaRPr lang="nl-NL" sz="2200" b="1" dirty="0">
                             <a:latin typeface="RijksoverheidSansText" panose="020B0503040202060203" pitchFamily="34" charset="0"/>
@@ -18113,8 +18107,8 @@
           </a:p>
         </p:txBody>
       </p:sp>
-      <mc:AlternateContent xmlns:mc="http://schemas.openxmlformats.org/markup-compatibility/2006">
-        <mc:Choice xmlns:a14="http://schemas.microsoft.com/office/drawing/2010/main" Requires="a14">
+      <mc:AlternateContent xmlns:mc="http://schemas.openxmlformats.org/markup-compatibility/2006" xmlns:a14="http://schemas.microsoft.com/office/drawing/2010/main">
+        <mc:Choice Requires="a14">
           <p:sp>
             <p:nvSpPr>
               <p:cNvPr id="3" name="Content Placeholder 2"/>
@@ -18561,7 +18555,7 @@
             </p:txBody>
           </p:sp>
         </mc:Choice>
-        <mc:Fallback>
+        <mc:Fallback xmlns="">
           <p:sp>
             <p:nvSpPr>
               <p:cNvPr id="3" name="Content Placeholder 2"/>
@@ -18738,8 +18732,8 @@
           </a:p>
         </p:txBody>
       </p:sp>
-      <mc:AlternateContent xmlns:mc="http://schemas.openxmlformats.org/markup-compatibility/2006">
-        <mc:Choice xmlns:a14="http://schemas.microsoft.com/office/drawing/2010/main" Requires="a14">
+      <mc:AlternateContent xmlns:mc="http://schemas.openxmlformats.org/markup-compatibility/2006" xmlns:a14="http://schemas.microsoft.com/office/drawing/2010/main">
+        <mc:Choice Requires="a14">
           <p:sp>
             <p:nvSpPr>
               <p:cNvPr id="3" name="Content Placeholder 2"/>
@@ -19438,7 +19432,6 @@
                 </a:r>
               </a:p>
               <a:p>
-                <a:pPr/>
                 <a:endParaRPr lang="en-US" b="0" i="1" dirty="0" smtClean="0">
                   <a:latin typeface="Cambria Math" panose="02040503050406030204" pitchFamily="18" charset="0"/>
                 </a:endParaRPr>
@@ -19826,7 +19819,7 @@
             </p:txBody>
           </p:sp>
         </mc:Choice>
-        <mc:Fallback>
+        <mc:Fallback xmlns="">
           <p:sp>
             <p:nvSpPr>
               <p:cNvPr id="3" name="Content Placeholder 2"/>
@@ -20003,8 +19996,8 @@
           </a:p>
         </p:txBody>
       </p:sp>
-      <mc:AlternateContent xmlns:mc="http://schemas.openxmlformats.org/markup-compatibility/2006">
-        <mc:Choice xmlns:a14="http://schemas.microsoft.com/office/drawing/2010/main" Requires="a14">
+      <mc:AlternateContent xmlns:mc="http://schemas.openxmlformats.org/markup-compatibility/2006" xmlns:a14="http://schemas.microsoft.com/office/drawing/2010/main">
+        <mc:Choice Requires="a14">
           <p:sp>
             <p:nvSpPr>
               <p:cNvPr id="3" name="Content Placeholder 2"/>
@@ -20933,7 +20926,7 @@
             </p:txBody>
           </p:sp>
         </mc:Choice>
-        <mc:Fallback>
+        <mc:Fallback xmlns="">
           <p:sp>
             <p:nvSpPr>
               <p:cNvPr id="3" name="Content Placeholder 2"/>
@@ -21110,8 +21103,8 @@
           </a:p>
         </p:txBody>
       </p:sp>
-      <mc:AlternateContent xmlns:mc="http://schemas.openxmlformats.org/markup-compatibility/2006">
-        <mc:Choice xmlns:a14="http://schemas.microsoft.com/office/drawing/2010/main" Requires="a14">
+      <mc:AlternateContent xmlns:mc="http://schemas.openxmlformats.org/markup-compatibility/2006" xmlns:a14="http://schemas.microsoft.com/office/drawing/2010/main">
+        <mc:Choice Requires="a14">
           <p:sp>
             <p:nvSpPr>
               <p:cNvPr id="3" name="Content Placeholder 2"/>
@@ -21417,43 +21410,31 @@
                   <a:rPr lang="en-US" dirty="0" smtClean="0">
                     <a:latin typeface="RijksoverheidSansText" panose="020B0503040202060203" pitchFamily="34" charset="0"/>
                   </a:rPr>
+                  <a:t> is een </a:t>
+                </a:r>
+                <a:r>
+                  <a:rPr lang="en-US" dirty="0" err="1" smtClean="0">
+                    <a:latin typeface="RijksoverheidSansText" panose="020B0503040202060203" pitchFamily="34" charset="0"/>
+                  </a:rPr>
+                  <a:t>binomiale</a:t>
+                </a:r>
+                <a:r>
+                  <a:rPr lang="en-US" dirty="0" smtClean="0">
+                    <a:latin typeface="RijksoverheidSansText" panose="020B0503040202060203" pitchFamily="34" charset="0"/>
+                  </a:rPr>
                   <a:t> </a:t>
                 </a:r>
                 <a:r>
+                  <a:rPr lang="en-US" dirty="0" err="1" smtClean="0">
+                    <a:latin typeface="RijksoverheidSansText" panose="020B0503040202060203" pitchFamily="34" charset="0"/>
+                  </a:rPr>
+                  <a:t>kansvariabele</a:t>
+                </a:r>
+                <a:r>
                   <a:rPr lang="en-US" dirty="0" smtClean="0">
                     <a:latin typeface="RijksoverheidSansText" panose="020B0503040202060203" pitchFamily="34" charset="0"/>
                   </a:rPr>
-                  <a:t>is een </a:t>
-                </a:r>
-                <a:r>
-                  <a:rPr lang="en-US" dirty="0" err="1" smtClean="0">
-                    <a:latin typeface="RijksoverheidSansText" panose="020B0503040202060203" pitchFamily="34" charset="0"/>
-                  </a:rPr>
-                  <a:t>binomiale</a:t>
-                </a:r>
-                <a:r>
-                  <a:rPr lang="en-US" dirty="0" smtClean="0">
-                    <a:latin typeface="RijksoverheidSansText" panose="020B0503040202060203" pitchFamily="34" charset="0"/>
-                  </a:rPr>
-                  <a:t> </a:t>
-                </a:r>
-                <a:r>
-                  <a:rPr lang="en-US" dirty="0" err="1" smtClean="0">
-                    <a:latin typeface="RijksoverheidSansText" panose="020B0503040202060203" pitchFamily="34" charset="0"/>
-                  </a:rPr>
-                  <a:t>kansvariabele</a:t>
-                </a:r>
-                <a:r>
-                  <a:rPr lang="en-US" dirty="0" smtClean="0">
-                    <a:latin typeface="RijksoverheidSansText" panose="020B0503040202060203" pitchFamily="34" charset="0"/>
-                  </a:rPr>
-                  <a:t> </a:t>
-                </a:r>
-                <a:r>
-                  <a:rPr lang="en-US" dirty="0" smtClean="0">
-                    <a:latin typeface="RijksoverheidSansText" panose="020B0503040202060203" pitchFamily="34" charset="0"/>
-                  </a:rPr>
-                  <a:t>met </a:t>
+                  <a:t> met </a:t>
                 </a:r>
                 <a14:m>
                   <m:oMath xmlns:m="http://schemas.openxmlformats.org/officeDocument/2006/math">
@@ -21535,9 +21516,6 @@
                   </a:rPr>
                   <a:t>:</a:t>
                 </a:r>
-                <a:endParaRPr lang="nl-NL" dirty="0" smtClean="0">
-                  <a:latin typeface="RijksoverheidSansText" panose="020B0503040202060203" pitchFamily="34" charset="0"/>
-                </a:endParaRPr>
               </a:p>
               <a:p>
                 <a:pPr marL="342900" indent="-342900">
@@ -22254,7 +22232,7 @@
             </p:txBody>
           </p:sp>
         </mc:Choice>
-        <mc:Fallback>
+        <mc:Fallback xmlns="">
           <p:sp>
             <p:nvSpPr>
               <p:cNvPr id="3" name="Content Placeholder 2"/>
@@ -22423,8 +22401,8 @@
           </a:p>
         </p:txBody>
       </p:sp>
-      <mc:AlternateContent xmlns:mc="http://schemas.openxmlformats.org/markup-compatibility/2006">
-        <mc:Choice xmlns:a14="http://schemas.microsoft.com/office/drawing/2010/main" Requires="a14">
+      <mc:AlternateContent xmlns:mc="http://schemas.openxmlformats.org/markup-compatibility/2006" xmlns:a14="http://schemas.microsoft.com/office/drawing/2010/main">
+        <mc:Choice Requires="a14">
           <p:sp>
             <p:nvSpPr>
               <p:cNvPr id="3" name="Content Placeholder 2"/>
@@ -22898,7 +22876,7 @@
             </p:txBody>
           </p:sp>
         </mc:Choice>
-        <mc:Fallback>
+        <mc:Fallback xmlns="">
           <p:sp>
             <p:nvSpPr>
               <p:cNvPr id="3" name="Content Placeholder 2"/>
@@ -23067,8 +23045,8 @@
           </a:p>
         </p:txBody>
       </p:sp>
-      <mc:AlternateContent xmlns:mc="http://schemas.openxmlformats.org/markup-compatibility/2006">
-        <mc:Choice xmlns:a14="http://schemas.microsoft.com/office/drawing/2010/main" Requires="a14">
+      <mc:AlternateContent xmlns:mc="http://schemas.openxmlformats.org/markup-compatibility/2006" xmlns:a14="http://schemas.microsoft.com/office/drawing/2010/main">
+        <mc:Choice Requires="a14">
           <p:sp>
             <p:nvSpPr>
               <p:cNvPr id="3" name="Content Placeholder 2"/>
@@ -23816,7 +23794,7 @@
             </p:txBody>
           </p:sp>
         </mc:Choice>
-        <mc:Fallback>
+        <mc:Fallback xmlns="">
           <p:sp>
             <p:nvSpPr>
               <p:cNvPr id="3" name="Content Placeholder 2"/>
@@ -23993,8 +23971,8 @@
           </a:p>
         </p:txBody>
       </p:sp>
-      <mc:AlternateContent xmlns:mc="http://schemas.openxmlformats.org/markup-compatibility/2006">
-        <mc:Choice xmlns:a14="http://schemas.microsoft.com/office/drawing/2010/main" Requires="a14">
+      <mc:AlternateContent xmlns:mc="http://schemas.openxmlformats.org/markup-compatibility/2006" xmlns:a14="http://schemas.microsoft.com/office/drawing/2010/main">
+        <mc:Choice Requires="a14">
           <p:sp>
             <p:nvSpPr>
               <p:cNvPr id="3" name="Content Placeholder 2"/>
@@ -24394,7 +24372,7 @@
             </p:txBody>
           </p:sp>
         </mc:Choice>
-        <mc:Fallback>
+        <mc:Fallback xmlns="">
           <p:sp>
             <p:nvSpPr>
               <p:cNvPr id="3" name="Content Placeholder 2"/>
@@ -24571,8 +24549,8 @@
           </a:p>
         </p:txBody>
       </p:sp>
-      <mc:AlternateContent xmlns:mc="http://schemas.openxmlformats.org/markup-compatibility/2006">
-        <mc:Choice xmlns:a14="http://schemas.microsoft.com/office/drawing/2010/main" Requires="a14">
+      <mc:AlternateContent xmlns:mc="http://schemas.openxmlformats.org/markup-compatibility/2006" xmlns:a14="http://schemas.microsoft.com/office/drawing/2010/main">
+        <mc:Choice Requires="a14">
           <p:sp>
             <p:nvSpPr>
               <p:cNvPr id="3" name="Content Placeholder 2"/>
@@ -24840,11 +24818,7 @@
                 </a:r>
                 <a:r>
                   <a:rPr lang="en-US" dirty="0" smtClean="0"/>
-                  <a:t> </a:t>
-                </a:r>
-                <a:r>
-                  <a:rPr lang="en-US" dirty="0" smtClean="0"/>
-                  <a:t>met</a:t>
+                  <a:t> met</a:t>
                 </a:r>
                 <a:endParaRPr lang="en-US" dirty="0"/>
               </a:p>
@@ -25077,11 +25051,7 @@
                 </a:r>
                 <a:r>
                   <a:rPr lang="en-US" dirty="0" smtClean="0"/>
-                  <a:t> </a:t>
-                </a:r>
-                <a:r>
-                  <a:rPr lang="en-US" dirty="0" smtClean="0"/>
-                  <a:t>is </a:t>
+                  <a:t> is </a:t>
                 </a:r>
                 <a:r>
                   <a:rPr lang="en-US" dirty="0" err="1" smtClean="0"/>
@@ -25106,6 +25076,7 @@
                 </a:endParaRPr>
               </a:p>
               <a:p>
+                <a:pPr/>
                 <a:r>
                   <a:rPr lang="en-US" b="0" dirty="0" smtClean="0"/>
                   <a:t> </a:t>
@@ -25550,7 +25521,7 @@
             </p:txBody>
           </p:sp>
         </mc:Choice>
-        <mc:Fallback>
+        <mc:Fallback xmlns="">
           <p:sp>
             <p:nvSpPr>
               <p:cNvPr id="3" name="Content Placeholder 2"/>
@@ -25735,8 +25706,8 @@
           </a:p>
         </p:txBody>
       </p:sp>
-      <mc:AlternateContent xmlns:mc="http://schemas.openxmlformats.org/markup-compatibility/2006">
-        <mc:Choice xmlns:a14="http://schemas.microsoft.com/office/drawing/2010/main" Requires="a14">
+      <mc:AlternateContent xmlns:mc="http://schemas.openxmlformats.org/markup-compatibility/2006" xmlns:a14="http://schemas.microsoft.com/office/drawing/2010/main">
+        <mc:Choice Requires="a14">
           <p:sp>
             <p:nvSpPr>
               <p:cNvPr id="5123" name="Rectangle 1027"/>
@@ -25992,9 +25963,6 @@
                   </a:rPr>
                   <a:t>uitkomsten</a:t>
                 </a:r>
-                <a:endParaRPr lang="nl-NL" sz="2000" dirty="0">
-                  <a:latin typeface="RijksoverheidSansText" panose="020B0503040202060203" pitchFamily="34" charset="0"/>
-                </a:endParaRPr>
               </a:p>
               <a:p>
                 <a:pPr marL="342900" indent="-342900">
@@ -26143,9 +26111,6 @@
                   </a:rPr>
                   <a:t> successen te garanderen?</a:t>
                 </a:r>
-                <a:endParaRPr lang="nl-NL" sz="2000" dirty="0">
-                  <a:latin typeface="RijksoverheidSansText" panose="020B0503040202060203" pitchFamily="34" charset="0"/>
-                </a:endParaRPr>
               </a:p>
               <a:p>
                 <a:endParaRPr lang="nl-NL" sz="2400" dirty="0"/>
@@ -26160,7 +26125,7 @@
             </p:txBody>
           </p:sp>
         </mc:Choice>
-        <mc:Fallback>
+        <mc:Fallback xmlns="">
           <p:sp>
             <p:nvSpPr>
               <p:cNvPr id="5123" name="Rectangle 1027"/>
@@ -26320,8 +26285,8 @@
           </a:p>
         </p:txBody>
       </p:sp>
-      <mc:AlternateContent xmlns:mc="http://schemas.openxmlformats.org/markup-compatibility/2006">
-        <mc:Choice xmlns:a14="http://schemas.microsoft.com/office/drawing/2010/main" Requires="a14">
+      <mc:AlternateContent xmlns:mc="http://schemas.openxmlformats.org/markup-compatibility/2006" xmlns:a14="http://schemas.microsoft.com/office/drawing/2010/main">
+        <mc:Choice Requires="a14">
           <p:sp>
             <p:nvSpPr>
               <p:cNvPr id="3" name="Content Placeholder 2"/>
@@ -26793,14 +26758,11 @@
                   </a:rPr>
                   <a:t>?</a:t>
                 </a:r>
-                <a:endParaRPr lang="en-US" dirty="0" smtClean="0">
-                  <a:latin typeface="RijksoverheidSansText" panose="020B0503040202060203" pitchFamily="34" charset="0"/>
-                </a:endParaRPr>
               </a:p>
             </p:txBody>
           </p:sp>
         </mc:Choice>
-        <mc:Fallback>
+        <mc:Fallback xmlns="">
           <p:sp>
             <p:nvSpPr>
               <p:cNvPr id="3" name="Content Placeholder 2"/>
@@ -27208,8 +27170,8 @@
           </a:p>
         </p:txBody>
       </p:sp>
-      <mc:AlternateContent xmlns:mc="http://schemas.openxmlformats.org/markup-compatibility/2006">
-        <mc:Choice xmlns:a14="http://schemas.microsoft.com/office/drawing/2010/main" Requires="a14">
+      <mc:AlternateContent xmlns:mc="http://schemas.openxmlformats.org/markup-compatibility/2006" xmlns:a14="http://schemas.microsoft.com/office/drawing/2010/main">
+        <mc:Choice Requires="a14">
           <p:graphicFrame>
             <p:nvGraphicFramePr>
               <p:cNvPr id="4" name="Tabel 3"/>
@@ -27991,7 +27953,7 @@
             </a:graphic>
           </p:graphicFrame>
         </mc:Choice>
-        <mc:Fallback>
+        <mc:Fallback xmlns="">
           <p:graphicFrame>
             <p:nvGraphicFramePr>
               <p:cNvPr id="4" name="Tabel 3"/>
@@ -28575,13 +28537,7 @@
               <a:rPr lang="en-US" sz="2400" i="1" dirty="0" err="1" smtClean="0">
                 <a:latin typeface="RijksoverheidSansText" panose="020B0503040202060203" pitchFamily="34" charset="0"/>
               </a:rPr>
-              <a:t>opgave</a:t>
-            </a:r>
-            <a:r>
-              <a:rPr lang="en-US" sz="2400" i="1" dirty="0" err="1" smtClean="0">
-                <a:latin typeface="RijksoverheidSansText" panose="020B0503040202060203" pitchFamily="34" charset="0"/>
-              </a:rPr>
-              <a:t>n</a:t>
+              <a:t>opgaven</a:t>
             </a:r>
             <a:r>
               <a:rPr lang="en-US" sz="2400" i="1" dirty="0" smtClean="0">
@@ -28629,13 +28585,7 @@
               <a:rPr lang="en-US" sz="2000" dirty="0" smtClean="0">
                 <a:latin typeface="RijksoverheidSansText" panose="020B0503040202060203" pitchFamily="34" charset="0"/>
               </a:rPr>
-              <a:t>H6</a:t>
-            </a:r>
-            <a:r>
-              <a:rPr lang="en-US" sz="2000" dirty="0" smtClean="0">
-                <a:latin typeface="RijksoverheidSansText" panose="020B0503040202060203" pitchFamily="34" charset="0"/>
-              </a:rPr>
-              <a:t>: 8, 10, 12, 14</a:t>
+              <a:t>H6: 8, 10, 12, 14</a:t>
             </a:r>
             <a:endParaRPr lang="en-US" sz="2000" dirty="0">
               <a:latin typeface="RijksoverheidSansText" panose="020B0503040202060203" pitchFamily="34" charset="0"/>
@@ -28787,8 +28737,16 @@
               <a:buChar char="•"/>
             </a:pPr>
             <a:r>
+              <a:rPr lang="en-US" sz="2400" smtClean="0"/>
+              <a:t>verwachtingswaarde</a:t>
+            </a:r>
+            <a:r>
+              <a:rPr lang="en-US" sz="2400" dirty="0" smtClean="0"/>
+              <a:t> </a:t>
+            </a:r>
+            <a:r>
               <a:rPr lang="en-US" sz="2400" dirty="0" err="1"/>
-              <a:t>Verwachtingswaarde</a:t>
+              <a:t>en</a:t>
             </a:r>
             <a:r>
               <a:rPr lang="en-US" sz="2400" dirty="0"/>
@@ -28796,22 +28754,14 @@
             </a:r>
             <a:r>
               <a:rPr lang="en-US" sz="2400" dirty="0" err="1"/>
-              <a:t>en</a:t>
+              <a:t>variantie</a:t>
             </a:r>
             <a:r>
               <a:rPr lang="en-US" sz="2400" dirty="0"/>
               <a:t> </a:t>
             </a:r>
             <a:r>
-              <a:rPr lang="en-US" sz="2400" dirty="0" err="1"/>
-              <a:t>variantie</a:t>
-            </a:r>
-            <a:r>
-              <a:rPr lang="en-US" sz="2400" dirty="0"/>
-              <a:t> </a:t>
-            </a:r>
-            <a:r>
-              <a:rPr lang="en-US" sz="2400" dirty="0" err="1"/>
+              <a:rPr lang="en-US" sz="2400" i="1" dirty="0" err="1"/>
               <a:t>berekenen</a:t>
             </a:r>
             <a:r>
@@ -28868,7 +28818,19 @@
             </a:pPr>
             <a:r>
               <a:rPr lang="nl-NL" sz="2400" dirty="0"/>
-              <a:t>De connectie van de binomiale verdeling met statistiek begrijpen en uitleggen</a:t>
+              <a:t>De connectie van de binomiale verdeling met statistiek </a:t>
+            </a:r>
+            <a:r>
+              <a:rPr lang="nl-NL" sz="2400" i="1" dirty="0"/>
+              <a:t>begrijpen</a:t>
+            </a:r>
+            <a:r>
+              <a:rPr lang="nl-NL" sz="2400" dirty="0"/>
+              <a:t> en </a:t>
+            </a:r>
+            <a:r>
+              <a:rPr lang="nl-NL" sz="2400" i="1" dirty="0"/>
+              <a:t>uitleggen</a:t>
             </a:r>
           </a:p>
           <a:p>
@@ -29959,8 +29921,8 @@
           </a:p>
         </p:txBody>
       </p:sp>
-      <mc:AlternateContent xmlns:mc="http://schemas.openxmlformats.org/markup-compatibility/2006">
-        <mc:Choice xmlns:a14="http://schemas.microsoft.com/office/drawing/2010/main" Requires="a14">
+      <mc:AlternateContent xmlns:mc="http://schemas.openxmlformats.org/markup-compatibility/2006" xmlns:a14="http://schemas.microsoft.com/office/drawing/2010/main">
+        <mc:Choice Requires="a14">
           <p:sp>
             <p:nvSpPr>
               <p:cNvPr id="3" name="Content Placeholder 2"/>
@@ -31229,7 +31191,7 @@
             </p:txBody>
           </p:sp>
         </mc:Choice>
-        <mc:Fallback>
+        <mc:Fallback xmlns="">
           <p:sp>
             <p:nvSpPr>
               <p:cNvPr id="3" name="Content Placeholder 2"/>
@@ -32166,8 +32128,8 @@
           </a:prstGeom>
         </p:spPr>
       </p:pic>
-      <mc:AlternateContent xmlns:mc="http://schemas.openxmlformats.org/markup-compatibility/2006">
-        <mc:Choice xmlns:a14="http://schemas.microsoft.com/office/drawing/2010/main" Requires="a14">
+      <mc:AlternateContent xmlns:mc="http://schemas.openxmlformats.org/markup-compatibility/2006" xmlns:a14="http://schemas.microsoft.com/office/drawing/2010/main">
+        <mc:Choice Requires="a14">
           <p:sp>
             <p:nvSpPr>
               <p:cNvPr id="4" name="Tekstvak 3"/>
@@ -32352,7 +32314,7 @@
             </p:txBody>
           </p:sp>
         </mc:Choice>
-        <mc:Fallback>
+        <mc:Fallback xmlns="">
           <p:sp>
             <p:nvSpPr>
               <p:cNvPr id="4" name="Tekstvak 3"/>
@@ -32554,8 +32516,8 @@
           </a:p>
         </p:txBody>
       </p:sp>
-      <mc:AlternateContent xmlns:mc="http://schemas.openxmlformats.org/markup-compatibility/2006">
-        <mc:Choice xmlns:a14="http://schemas.microsoft.com/office/drawing/2010/main" Requires="a14">
+      <mc:AlternateContent xmlns:mc="http://schemas.openxmlformats.org/markup-compatibility/2006" xmlns:a14="http://schemas.microsoft.com/office/drawing/2010/main">
+        <mc:Choice Requires="a14">
           <p:sp>
             <p:nvSpPr>
               <p:cNvPr id="3" name="Content Placeholder 2"/>
@@ -33495,7 +33457,7 @@
             </p:txBody>
           </p:sp>
         </mc:Choice>
-        <mc:Fallback>
+        <mc:Fallback xmlns="">
           <p:sp>
             <p:nvSpPr>
               <p:cNvPr id="3" name="Content Placeholder 2"/>
@@ -33694,8 +33656,8 @@
           </a:p>
         </p:txBody>
       </p:sp>
-      <mc:AlternateContent xmlns:mc="http://schemas.openxmlformats.org/markup-compatibility/2006">
-        <mc:Choice xmlns:a14="http://schemas.microsoft.com/office/drawing/2010/main" Requires="a14">
+      <mc:AlternateContent xmlns:mc="http://schemas.openxmlformats.org/markup-compatibility/2006" xmlns:a14="http://schemas.microsoft.com/office/drawing/2010/main">
+        <mc:Choice Requires="a14">
           <p:sp>
             <p:nvSpPr>
               <p:cNvPr id="3" name="Content Placeholder 2"/>
@@ -33723,13 +33685,7 @@
                   <a:rPr lang="en-US" sz="2400" b="1" dirty="0" smtClean="0">
                     <a:latin typeface="RijksoverheidSansText" panose="020B0503040202060203" pitchFamily="34" charset="0"/>
                   </a:rPr>
-                  <a:t>Methode</a:t>
-                </a:r>
-                <a:r>
-                  <a:rPr lang="en-US" sz="2400" b="1" dirty="0" smtClean="0">
-                    <a:latin typeface="RijksoverheidSansText" panose="020B0503040202060203" pitchFamily="34" charset="0"/>
-                  </a:rPr>
-                  <a:t> </a:t>
+                  <a:t>Methode </a:t>
                 </a:r>
                 <a:r>
                   <a:rPr lang="en-US" sz="2400" b="1" dirty="0">
@@ -35097,7 +35053,7 @@
             </p:txBody>
           </p:sp>
         </mc:Choice>
-        <mc:Fallback>
+        <mc:Fallback xmlns="">
           <p:sp>
             <p:nvSpPr>
               <p:cNvPr id="3" name="Content Placeholder 2"/>
